--- a/assets/images/Administration_Devices.pptx
+++ b/assets/images/Administration_Devices.pptx
@@ -5,11 +5,12 @@
     <p:sldMasterId id="2147483684" r:id="rId4"/>
   </p:sldMasterIdLst>
   <p:notesMasterIdLst>
-    <p:notesMasterId r:id="rId7"/>
+    <p:notesMasterId r:id="rId8"/>
   </p:notesMasterIdLst>
   <p:sldIdLst>
     <p:sldId id="256" r:id="rId5"/>
     <p:sldId id="257" r:id="rId6"/>
+    <p:sldId id="258" r:id="rId7"/>
   </p:sldIdLst>
   <p:sldSz cx="21601113" cy="14400213"/>
   <p:notesSz cx="9144000" cy="6858000"/>
@@ -403,7 +404,7 @@
           <a:p>
             <a:fld id="{43466010-90F5-41E6-AAE8-7E580DBF8C7C}" type="datetimeFigureOut">
               <a:rPr lang="en-DK" smtClean="0"/>
-              <a:t>23/02/2026</a:t>
+              <a:t>24/02/2026</a:t>
             </a:fld>
             <a:endParaRPr lang="en-DK"/>
           </a:p>
@@ -978,7 +979,7 @@
           <a:p>
             <a:fld id="{F1465E3F-0B9F-47C9-9E08-5C827E095B3E}" type="datetimeFigureOut">
               <a:rPr lang="en-DK" smtClean="0"/>
-              <a:t>23/02/2026</a:t>
+              <a:t>24/02/2026</a:t>
             </a:fld>
             <a:endParaRPr lang="en-DK"/>
           </a:p>
@@ -1148,7 +1149,7 @@
           <a:p>
             <a:fld id="{F1465E3F-0B9F-47C9-9E08-5C827E095B3E}" type="datetimeFigureOut">
               <a:rPr lang="en-DK" smtClean="0"/>
-              <a:t>23/02/2026</a:t>
+              <a:t>24/02/2026</a:t>
             </a:fld>
             <a:endParaRPr lang="en-DK"/>
           </a:p>
@@ -1328,7 +1329,7 @@
           <a:p>
             <a:fld id="{F1465E3F-0B9F-47C9-9E08-5C827E095B3E}" type="datetimeFigureOut">
               <a:rPr lang="en-DK" smtClean="0"/>
-              <a:t>23/02/2026</a:t>
+              <a:t>24/02/2026</a:t>
             </a:fld>
             <a:endParaRPr lang="en-DK"/>
           </a:p>
@@ -1498,7 +1499,7 @@
           <a:p>
             <a:fld id="{F1465E3F-0B9F-47C9-9E08-5C827E095B3E}" type="datetimeFigureOut">
               <a:rPr lang="en-DK" smtClean="0"/>
-              <a:t>23/02/2026</a:t>
+              <a:t>24/02/2026</a:t>
             </a:fld>
             <a:endParaRPr lang="en-DK"/>
           </a:p>
@@ -1744,7 +1745,7 @@
           <a:p>
             <a:fld id="{F1465E3F-0B9F-47C9-9E08-5C827E095B3E}" type="datetimeFigureOut">
               <a:rPr lang="en-DK" smtClean="0"/>
-              <a:t>23/02/2026</a:t>
+              <a:t>24/02/2026</a:t>
             </a:fld>
             <a:endParaRPr lang="en-DK"/>
           </a:p>
@@ -1976,7 +1977,7 @@
           <a:p>
             <a:fld id="{F1465E3F-0B9F-47C9-9E08-5C827E095B3E}" type="datetimeFigureOut">
               <a:rPr lang="en-DK" smtClean="0"/>
-              <a:t>23/02/2026</a:t>
+              <a:t>24/02/2026</a:t>
             </a:fld>
             <a:endParaRPr lang="en-DK"/>
           </a:p>
@@ -2343,7 +2344,7 @@
           <a:p>
             <a:fld id="{F1465E3F-0B9F-47C9-9E08-5C827E095B3E}" type="datetimeFigureOut">
               <a:rPr lang="en-DK" smtClean="0"/>
-              <a:t>23/02/2026</a:t>
+              <a:t>24/02/2026</a:t>
             </a:fld>
             <a:endParaRPr lang="en-DK"/>
           </a:p>
@@ -2461,7 +2462,7 @@
           <a:p>
             <a:fld id="{F1465E3F-0B9F-47C9-9E08-5C827E095B3E}" type="datetimeFigureOut">
               <a:rPr lang="en-DK" smtClean="0"/>
-              <a:t>23/02/2026</a:t>
+              <a:t>24/02/2026</a:t>
             </a:fld>
             <a:endParaRPr lang="en-DK"/>
           </a:p>
@@ -2556,7 +2557,7 @@
           <a:p>
             <a:fld id="{F1465E3F-0B9F-47C9-9E08-5C827E095B3E}" type="datetimeFigureOut">
               <a:rPr lang="en-DK" smtClean="0"/>
-              <a:t>23/02/2026</a:t>
+              <a:t>24/02/2026</a:t>
             </a:fld>
             <a:endParaRPr lang="en-DK"/>
           </a:p>
@@ -2833,7 +2834,7 @@
           <a:p>
             <a:fld id="{F1465E3F-0B9F-47C9-9E08-5C827E095B3E}" type="datetimeFigureOut">
               <a:rPr lang="en-DK" smtClean="0"/>
-              <a:t>23/02/2026</a:t>
+              <a:t>24/02/2026</a:t>
             </a:fld>
             <a:endParaRPr lang="en-DK"/>
           </a:p>
@@ -3090,7 +3091,7 @@
           <a:p>
             <a:fld id="{F1465E3F-0B9F-47C9-9E08-5C827E095B3E}" type="datetimeFigureOut">
               <a:rPr lang="en-DK" smtClean="0"/>
-              <a:t>23/02/2026</a:t>
+              <a:t>24/02/2026</a:t>
             </a:fld>
             <a:endParaRPr lang="en-DK"/>
           </a:p>
@@ -3303,7 +3304,7 @@
           <a:p>
             <a:fld id="{F1465E3F-0B9F-47C9-9E08-5C827E095B3E}" type="datetimeFigureOut">
               <a:rPr lang="en-DK" smtClean="0"/>
-              <a:t>23/02/2026</a:t>
+              <a:t>24/02/2026</a:t>
             </a:fld>
             <a:endParaRPr lang="en-DK"/>
           </a:p>
@@ -3708,6 +3709,466 @@
           <a:chExt cx="0" cy="0"/>
         </a:xfrm>
       </p:grpSpPr>
+      <p:pic>
+        <p:nvPicPr>
+          <p:cNvPr id="3" name="Picture 2" descr="The image displays the LabBench Designer software interface, showcasing various devices and protocols for lab automation.&#10;&#10;AI-generated content may be incorrect.">
+            <a:extLst>
+              <a:ext uri="{FF2B5EF4-FFF2-40B4-BE49-F238E27FC236}">
+                <a16:creationId xmlns:a16="http://schemas.microsoft.com/office/drawing/2014/main" id="{4470B491-FE05-FD6D-490E-ABD22847F3D4}"/>
+              </a:ext>
+            </a:extLst>
+          </p:cNvPr>
+          <p:cNvPicPr>
+            <a:picLocks noChangeAspect="1"/>
+          </p:cNvPicPr>
+          <p:nvPr/>
+        </p:nvPicPr>
+        <p:blipFill>
+          <a:blip r:embed="rId3"/>
+          <a:stretch>
+            <a:fillRect/>
+          </a:stretch>
+        </p:blipFill>
+        <p:spPr>
+          <a:xfrm>
+            <a:off x="8422926" y="5687617"/>
+            <a:ext cx="5400000" cy="3024977"/>
+          </a:xfrm>
+          <a:prstGeom prst="rect">
+            <a:avLst/>
+          </a:prstGeom>
+        </p:spPr>
+      </p:pic>
+      <p:sp>
+        <p:nvSpPr>
+          <p:cNvPr id="4" name="TextBox 3">
+            <a:extLst>
+              <a:ext uri="{FF2B5EF4-FFF2-40B4-BE49-F238E27FC236}">
+                <a16:creationId xmlns:a16="http://schemas.microsoft.com/office/drawing/2014/main" id="{30C8F954-AC2D-3DE5-03E3-D945BB659DDF}"/>
+              </a:ext>
+            </a:extLst>
+          </p:cNvPr>
+          <p:cNvSpPr txBox="1"/>
+          <p:nvPr/>
+        </p:nvSpPr>
+        <p:spPr>
+          <a:xfrm>
+            <a:off x="8809462" y="5135881"/>
+            <a:ext cx="2234651" cy="369332"/>
+          </a:xfrm>
+          <a:prstGeom prst="rect">
+            <a:avLst/>
+          </a:prstGeom>
+          <a:noFill/>
+        </p:spPr>
+        <p:txBody>
+          <a:bodyPr wrap="square" rtlCol="0">
+            <a:spAutoFit/>
+          </a:bodyPr>
+          <a:lstStyle/>
+          <a:p>
+            <a:r>
+              <a:rPr lang="en-GB" dirty="0"/>
+              <a:t>Select type of device</a:t>
+            </a:r>
+            <a:endParaRPr lang="en-DK" dirty="0"/>
+          </a:p>
+        </p:txBody>
+      </p:sp>
+      <p:cxnSp>
+        <p:nvCxnSpPr>
+          <p:cNvPr id="5" name="Straight Arrow Connector 4">
+            <a:extLst>
+              <a:ext uri="{FF2B5EF4-FFF2-40B4-BE49-F238E27FC236}">
+                <a16:creationId xmlns:a16="http://schemas.microsoft.com/office/drawing/2014/main" id="{BBF01621-F99C-5BFF-EEAD-83724B7663F6}"/>
+              </a:ext>
+            </a:extLst>
+          </p:cNvPr>
+          <p:cNvCxnSpPr>
+            <a:cxnSpLocks/>
+            <a:stCxn id="4" idx="2"/>
+          </p:cNvCxnSpPr>
+          <p:nvPr/>
+        </p:nvCxnSpPr>
+        <p:spPr>
+          <a:xfrm>
+            <a:off x="9926788" y="5505213"/>
+            <a:ext cx="0" cy="631825"/>
+          </a:xfrm>
+          <a:prstGeom prst="straightConnector1">
+            <a:avLst/>
+          </a:prstGeom>
+          <a:ln w="28575">
+            <a:solidFill>
+              <a:srgbClr val="FF0000"/>
+            </a:solidFill>
+            <a:tailEnd type="triangle"/>
+          </a:ln>
+        </p:spPr>
+        <p:style>
+          <a:lnRef idx="2">
+            <a:schemeClr val="accent1"/>
+          </a:lnRef>
+          <a:fillRef idx="0">
+            <a:schemeClr val="accent1"/>
+          </a:fillRef>
+          <a:effectRef idx="1">
+            <a:schemeClr val="accent1"/>
+          </a:effectRef>
+          <a:fontRef idx="minor">
+            <a:schemeClr val="tx1"/>
+          </a:fontRef>
+        </p:style>
+      </p:cxnSp>
+      <p:sp>
+        <p:nvSpPr>
+          <p:cNvPr id="9" name="TextBox 8">
+            <a:extLst>
+              <a:ext uri="{FF2B5EF4-FFF2-40B4-BE49-F238E27FC236}">
+                <a16:creationId xmlns:a16="http://schemas.microsoft.com/office/drawing/2014/main" id="{E7D4966F-F2BB-D387-CD21-F6D721154E6D}"/>
+              </a:ext>
+            </a:extLst>
+          </p:cNvPr>
+          <p:cNvSpPr txBox="1"/>
+          <p:nvPr/>
+        </p:nvSpPr>
+        <p:spPr>
+          <a:xfrm>
+            <a:off x="11089112" y="5135881"/>
+            <a:ext cx="2430036" cy="369332"/>
+          </a:xfrm>
+          <a:prstGeom prst="rect">
+            <a:avLst/>
+          </a:prstGeom>
+          <a:noFill/>
+        </p:spPr>
+        <p:txBody>
+          <a:bodyPr wrap="square" rtlCol="0">
+            <a:spAutoFit/>
+          </a:bodyPr>
+          <a:lstStyle/>
+          <a:p>
+            <a:r>
+              <a:rPr lang="en-GB" dirty="0"/>
+              <a:t>List of added devices</a:t>
+            </a:r>
+            <a:endParaRPr lang="en-DK" dirty="0"/>
+          </a:p>
+        </p:txBody>
+      </p:sp>
+      <p:cxnSp>
+        <p:nvCxnSpPr>
+          <p:cNvPr id="10" name="Straight Arrow Connector 9">
+            <a:extLst>
+              <a:ext uri="{FF2B5EF4-FFF2-40B4-BE49-F238E27FC236}">
+                <a16:creationId xmlns:a16="http://schemas.microsoft.com/office/drawing/2014/main" id="{004BF185-A7C4-B839-FB6A-460F6A61BBC7}"/>
+              </a:ext>
+            </a:extLst>
+          </p:cNvPr>
+          <p:cNvCxnSpPr>
+            <a:cxnSpLocks/>
+            <a:stCxn id="9" idx="2"/>
+          </p:cNvCxnSpPr>
+          <p:nvPr/>
+        </p:nvCxnSpPr>
+        <p:spPr>
+          <a:xfrm>
+            <a:off x="12304130" y="5505213"/>
+            <a:ext cx="0" cy="631825"/>
+          </a:xfrm>
+          <a:prstGeom prst="straightConnector1">
+            <a:avLst/>
+          </a:prstGeom>
+          <a:ln w="28575">
+            <a:solidFill>
+              <a:srgbClr val="FF0000"/>
+            </a:solidFill>
+            <a:tailEnd type="triangle"/>
+          </a:ln>
+        </p:spPr>
+        <p:style>
+          <a:lnRef idx="2">
+            <a:schemeClr val="accent1"/>
+          </a:lnRef>
+          <a:fillRef idx="0">
+            <a:schemeClr val="accent1"/>
+          </a:fillRef>
+          <a:effectRef idx="1">
+            <a:schemeClr val="accent1"/>
+          </a:effectRef>
+          <a:fontRef idx="minor">
+            <a:schemeClr val="tx1"/>
+          </a:fontRef>
+        </p:style>
+      </p:cxnSp>
+      <p:sp>
+        <p:nvSpPr>
+          <p:cNvPr id="13" name="Oval 12">
+            <a:extLst>
+              <a:ext uri="{FF2B5EF4-FFF2-40B4-BE49-F238E27FC236}">
+                <a16:creationId xmlns:a16="http://schemas.microsoft.com/office/drawing/2014/main" id="{B6FA5FB4-0211-5C25-AB05-D729EB423C27}"/>
+              </a:ext>
+            </a:extLst>
+          </p:cNvPr>
+          <p:cNvSpPr/>
+          <p:nvPr/>
+        </p:nvSpPr>
+        <p:spPr>
+          <a:xfrm>
+            <a:off x="13519148" y="5994400"/>
+            <a:ext cx="216000" cy="216000"/>
+          </a:xfrm>
+          <a:prstGeom prst="ellipse">
+            <a:avLst/>
+          </a:prstGeom>
+          <a:noFill/>
+          <a:ln>
+            <a:solidFill>
+              <a:srgbClr val="FF0000"/>
+            </a:solidFill>
+          </a:ln>
+        </p:spPr>
+        <p:style>
+          <a:lnRef idx="2">
+            <a:schemeClr val="accent1">
+              <a:shade val="15000"/>
+            </a:schemeClr>
+          </a:lnRef>
+          <a:fillRef idx="1">
+            <a:schemeClr val="accent1"/>
+          </a:fillRef>
+          <a:effectRef idx="0">
+            <a:schemeClr val="accent1"/>
+          </a:effectRef>
+          <a:fontRef idx="minor">
+            <a:schemeClr val="lt1"/>
+          </a:fontRef>
+        </p:style>
+        <p:txBody>
+          <a:bodyPr rtlCol="0" anchor="ctr"/>
+          <a:lstStyle/>
+          <a:p>
+            <a:pPr algn="ctr"/>
+            <a:endParaRPr lang="en-DK"/>
+          </a:p>
+        </p:txBody>
+      </p:sp>
+      <p:sp>
+        <p:nvSpPr>
+          <p:cNvPr id="14" name="Rectangle: Rounded Corners 13">
+            <a:extLst>
+              <a:ext uri="{FF2B5EF4-FFF2-40B4-BE49-F238E27FC236}">
+                <a16:creationId xmlns:a16="http://schemas.microsoft.com/office/drawing/2014/main" id="{ED00C571-A643-C266-836B-3EEEBC642773}"/>
+              </a:ext>
+            </a:extLst>
+          </p:cNvPr>
+          <p:cNvSpPr/>
+          <p:nvPr/>
+        </p:nvSpPr>
+        <p:spPr>
+          <a:xfrm>
+            <a:off x="13423762" y="6301183"/>
+            <a:ext cx="240314" cy="163117"/>
+          </a:xfrm>
+          <a:prstGeom prst="roundRect">
+            <a:avLst/>
+          </a:prstGeom>
+          <a:noFill/>
+          <a:ln>
+            <a:solidFill>
+              <a:srgbClr val="FF0000"/>
+            </a:solidFill>
+          </a:ln>
+        </p:spPr>
+        <p:style>
+          <a:lnRef idx="2">
+            <a:schemeClr val="accent1">
+              <a:shade val="15000"/>
+            </a:schemeClr>
+          </a:lnRef>
+          <a:fillRef idx="1">
+            <a:schemeClr val="accent1"/>
+          </a:fillRef>
+          <a:effectRef idx="0">
+            <a:schemeClr val="accent1"/>
+          </a:effectRef>
+          <a:fontRef idx="minor">
+            <a:schemeClr val="lt1"/>
+          </a:fontRef>
+        </p:style>
+        <p:txBody>
+          <a:bodyPr rtlCol="0" anchor="ctr"/>
+          <a:lstStyle/>
+          <a:p>
+            <a:pPr algn="ctr"/>
+            <a:endParaRPr lang="en-DK"/>
+          </a:p>
+        </p:txBody>
+      </p:sp>
+      <p:sp>
+        <p:nvSpPr>
+          <p:cNvPr id="15" name="TextBox 14">
+            <a:extLst>
+              <a:ext uri="{FF2B5EF4-FFF2-40B4-BE49-F238E27FC236}">
+                <a16:creationId xmlns:a16="http://schemas.microsoft.com/office/drawing/2014/main" id="{33B2632E-171D-2004-25B9-439215DC3570}"/>
+              </a:ext>
+            </a:extLst>
+          </p:cNvPr>
+          <p:cNvSpPr txBox="1"/>
+          <p:nvPr/>
+        </p:nvSpPr>
+        <p:spPr>
+          <a:xfrm>
+            <a:off x="13867925" y="5505213"/>
+            <a:ext cx="1537175" cy="369332"/>
+          </a:xfrm>
+          <a:prstGeom prst="rect">
+            <a:avLst/>
+          </a:prstGeom>
+          <a:noFill/>
+        </p:spPr>
+        <p:txBody>
+          <a:bodyPr wrap="square" rtlCol="0">
+            <a:spAutoFit/>
+          </a:bodyPr>
+          <a:lstStyle/>
+          <a:p>
+            <a:r>
+              <a:rPr lang="en-GB" dirty="0"/>
+              <a:t>Add devices</a:t>
+            </a:r>
+            <a:endParaRPr lang="en-DK" dirty="0"/>
+          </a:p>
+        </p:txBody>
+      </p:sp>
+      <p:sp>
+        <p:nvSpPr>
+          <p:cNvPr id="16" name="TextBox 15">
+            <a:extLst>
+              <a:ext uri="{FF2B5EF4-FFF2-40B4-BE49-F238E27FC236}">
+                <a16:creationId xmlns:a16="http://schemas.microsoft.com/office/drawing/2014/main" id="{590998B3-CB9E-B99B-6176-73490EEAA00C}"/>
+              </a:ext>
+            </a:extLst>
+          </p:cNvPr>
+          <p:cNvSpPr txBox="1"/>
+          <p:nvPr/>
+        </p:nvSpPr>
+        <p:spPr>
+          <a:xfrm>
+            <a:off x="13925075" y="6198075"/>
+            <a:ext cx="1861025" cy="369332"/>
+          </a:xfrm>
+          <a:prstGeom prst="rect">
+            <a:avLst/>
+          </a:prstGeom>
+          <a:noFill/>
+        </p:spPr>
+        <p:txBody>
+          <a:bodyPr wrap="square" rtlCol="0">
+            <a:spAutoFit/>
+          </a:bodyPr>
+          <a:lstStyle/>
+          <a:p>
+            <a:r>
+              <a:rPr lang="en-GB" dirty="0"/>
+              <a:t>Remove device</a:t>
+            </a:r>
+            <a:endParaRPr lang="en-DK" dirty="0"/>
+          </a:p>
+        </p:txBody>
+      </p:sp>
+      <p:cxnSp>
+        <p:nvCxnSpPr>
+          <p:cNvPr id="17" name="Straight Arrow Connector 16">
+            <a:extLst>
+              <a:ext uri="{FF2B5EF4-FFF2-40B4-BE49-F238E27FC236}">
+                <a16:creationId xmlns:a16="http://schemas.microsoft.com/office/drawing/2014/main" id="{E60B908E-69EE-CD2F-77BB-71FE87F99155}"/>
+              </a:ext>
+            </a:extLst>
+          </p:cNvPr>
+          <p:cNvCxnSpPr>
+            <a:cxnSpLocks/>
+            <a:stCxn id="16" idx="1"/>
+            <a:endCxn id="14" idx="3"/>
+          </p:cNvCxnSpPr>
+          <p:nvPr/>
+        </p:nvCxnSpPr>
+        <p:spPr>
+          <a:xfrm flipH="1">
+            <a:off x="13664076" y="6382741"/>
+            <a:ext cx="260999" cy="1"/>
+          </a:xfrm>
+          <a:prstGeom prst="straightConnector1">
+            <a:avLst/>
+          </a:prstGeom>
+          <a:ln w="28575">
+            <a:solidFill>
+              <a:srgbClr val="FF0000"/>
+            </a:solidFill>
+            <a:tailEnd type="triangle"/>
+          </a:ln>
+        </p:spPr>
+        <p:style>
+          <a:lnRef idx="2">
+            <a:schemeClr val="accent1"/>
+          </a:lnRef>
+          <a:fillRef idx="0">
+            <a:schemeClr val="accent1"/>
+          </a:fillRef>
+          <a:effectRef idx="1">
+            <a:schemeClr val="accent1"/>
+          </a:effectRef>
+          <a:fontRef idx="minor">
+            <a:schemeClr val="tx1"/>
+          </a:fontRef>
+        </p:style>
+      </p:cxnSp>
+      <p:cxnSp>
+        <p:nvCxnSpPr>
+          <p:cNvPr id="22" name="Connector: Elbow 21">
+            <a:extLst>
+              <a:ext uri="{FF2B5EF4-FFF2-40B4-BE49-F238E27FC236}">
+                <a16:creationId xmlns:a16="http://schemas.microsoft.com/office/drawing/2014/main" id="{30C7B4FD-7E17-1023-BA52-8EB57E4B5CB7}"/>
+              </a:ext>
+            </a:extLst>
+          </p:cNvPr>
+          <p:cNvCxnSpPr>
+            <a:cxnSpLocks/>
+            <a:stCxn id="15" idx="2"/>
+            <a:endCxn id="13" idx="6"/>
+          </p:cNvCxnSpPr>
+          <p:nvPr/>
+        </p:nvCxnSpPr>
+        <p:spPr>
+          <a:xfrm rot="5400000">
+            <a:off x="14071904" y="5537790"/>
+            <a:ext cx="227855" cy="901365"/>
+          </a:xfrm>
+          <a:prstGeom prst="bentConnector2">
+            <a:avLst/>
+          </a:prstGeom>
+          <a:ln w="28575">
+            <a:solidFill>
+              <a:srgbClr val="FF0000"/>
+            </a:solidFill>
+            <a:tailEnd type="triangle"/>
+          </a:ln>
+        </p:spPr>
+        <p:style>
+          <a:lnRef idx="2">
+            <a:schemeClr val="accent1"/>
+          </a:lnRef>
+          <a:fillRef idx="0">
+            <a:schemeClr val="accent1"/>
+          </a:fillRef>
+          <a:effectRef idx="1">
+            <a:schemeClr val="accent1"/>
+          </a:effectRef>
+          <a:fontRef idx="minor">
+            <a:schemeClr val="tx1"/>
+          </a:fontRef>
+        </p:style>
+      </p:cxnSp>
     </p:spTree>
     <p:extLst>
       <p:ext uri="{BB962C8B-B14F-4D97-AF65-F5344CB8AC3E}">
@@ -3738,10 +4199,368 @@
           <a:chExt cx="0" cy="0"/>
         </a:xfrm>
       </p:grpSpPr>
+      <p:pic>
+        <p:nvPicPr>
+          <p:cNvPr id="2" name="Picture 1">
+            <a:extLst>
+              <a:ext uri="{FF2B5EF4-FFF2-40B4-BE49-F238E27FC236}">
+                <a16:creationId xmlns:a16="http://schemas.microsoft.com/office/drawing/2014/main" id="{5CBD65E3-1C50-0375-80C9-8926F601683B}"/>
+              </a:ext>
+            </a:extLst>
+          </p:cNvPr>
+          <p:cNvPicPr>
+            <a:picLocks noChangeAspect="1"/>
+          </p:cNvPicPr>
+          <p:nvPr/>
+        </p:nvPicPr>
+        <p:blipFill>
+          <a:blip r:embed="rId3"/>
+          <a:stretch>
+            <a:fillRect/>
+          </a:stretch>
+        </p:blipFill>
+        <p:spPr>
+          <a:xfrm>
+            <a:off x="7639786" y="5467373"/>
+            <a:ext cx="4349013" cy="2411685"/>
+          </a:xfrm>
+          <a:prstGeom prst="rect">
+            <a:avLst/>
+          </a:prstGeom>
+        </p:spPr>
+      </p:pic>
+      <p:sp>
+        <p:nvSpPr>
+          <p:cNvPr id="4" name="TextBox 3">
+            <a:extLst>
+              <a:ext uri="{FF2B5EF4-FFF2-40B4-BE49-F238E27FC236}">
+                <a16:creationId xmlns:a16="http://schemas.microsoft.com/office/drawing/2014/main" id="{6DC2CA4C-0D8C-2D0A-ADDF-E9B7D0D57AA3}"/>
+              </a:ext>
+            </a:extLst>
+          </p:cNvPr>
+          <p:cNvSpPr txBox="1"/>
+          <p:nvPr/>
+        </p:nvSpPr>
+        <p:spPr>
+          <a:xfrm>
+            <a:off x="12202980" y="5282707"/>
+            <a:ext cx="1540165" cy="369332"/>
+          </a:xfrm>
+          <a:prstGeom prst="rect">
+            <a:avLst/>
+          </a:prstGeom>
+          <a:noFill/>
+        </p:spPr>
+        <p:txBody>
+          <a:bodyPr wrap="none" rtlCol="0">
+            <a:spAutoFit/>
+          </a:bodyPr>
+          <a:lstStyle/>
+          <a:p>
+            <a:r>
+              <a:rPr lang="en-GB" dirty="0"/>
+              <a:t>Scan all ports</a:t>
+            </a:r>
+            <a:endParaRPr lang="en-DK" dirty="0"/>
+          </a:p>
+        </p:txBody>
+      </p:sp>
+      <p:sp>
+        <p:nvSpPr>
+          <p:cNvPr id="5" name="TextBox 4">
+            <a:extLst>
+              <a:ext uri="{FF2B5EF4-FFF2-40B4-BE49-F238E27FC236}">
+                <a16:creationId xmlns:a16="http://schemas.microsoft.com/office/drawing/2014/main" id="{0B24964D-822C-F66F-8C0D-0F7CB1C43E35}"/>
+              </a:ext>
+            </a:extLst>
+          </p:cNvPr>
+          <p:cNvSpPr txBox="1"/>
+          <p:nvPr/>
+        </p:nvSpPr>
+        <p:spPr>
+          <a:xfrm>
+            <a:off x="12202980" y="5931376"/>
+            <a:ext cx="1140312" cy="369332"/>
+          </a:xfrm>
+          <a:prstGeom prst="rect">
+            <a:avLst/>
+          </a:prstGeom>
+          <a:noFill/>
+        </p:spPr>
+        <p:txBody>
+          <a:bodyPr wrap="none" rtlCol="0">
+            <a:spAutoFit/>
+          </a:bodyPr>
+          <a:lstStyle/>
+          <a:p>
+            <a:r>
+              <a:rPr lang="en-GB" dirty="0"/>
+              <a:t>Scan port</a:t>
+            </a:r>
+            <a:endParaRPr lang="en-DK" dirty="0"/>
+          </a:p>
+        </p:txBody>
+      </p:sp>
+      <p:cxnSp>
+        <p:nvCxnSpPr>
+          <p:cNvPr id="6" name="Straight Arrow Connector 5">
+            <a:extLst>
+              <a:ext uri="{FF2B5EF4-FFF2-40B4-BE49-F238E27FC236}">
+                <a16:creationId xmlns:a16="http://schemas.microsoft.com/office/drawing/2014/main" id="{28528B7E-4AAA-3319-9B59-3FD21A64EC6E}"/>
+              </a:ext>
+            </a:extLst>
+          </p:cNvPr>
+          <p:cNvCxnSpPr>
+            <a:cxnSpLocks/>
+            <a:stCxn id="5" idx="1"/>
+            <a:endCxn id="8" idx="3"/>
+          </p:cNvCxnSpPr>
+          <p:nvPr/>
+        </p:nvCxnSpPr>
+        <p:spPr>
+          <a:xfrm flipH="1">
+            <a:off x="11919047" y="6116042"/>
+            <a:ext cx="283933" cy="0"/>
+          </a:xfrm>
+          <a:prstGeom prst="straightConnector1">
+            <a:avLst/>
+          </a:prstGeom>
+          <a:ln w="28575">
+            <a:solidFill>
+              <a:srgbClr val="FF0000"/>
+            </a:solidFill>
+            <a:tailEnd type="triangle"/>
+          </a:ln>
+        </p:spPr>
+        <p:style>
+          <a:lnRef idx="2">
+            <a:schemeClr val="accent1"/>
+          </a:lnRef>
+          <a:fillRef idx="0">
+            <a:schemeClr val="accent1"/>
+          </a:fillRef>
+          <a:effectRef idx="1">
+            <a:schemeClr val="accent1"/>
+          </a:effectRef>
+          <a:fontRef idx="minor">
+            <a:schemeClr val="tx1"/>
+          </a:fontRef>
+        </p:style>
+      </p:cxnSp>
+      <p:sp>
+        <p:nvSpPr>
+          <p:cNvPr id="7" name="Oval 6">
+            <a:extLst>
+              <a:ext uri="{FF2B5EF4-FFF2-40B4-BE49-F238E27FC236}">
+                <a16:creationId xmlns:a16="http://schemas.microsoft.com/office/drawing/2014/main" id="{5FA3EBFF-B519-9FB5-1EC5-54004CC1F8C0}"/>
+              </a:ext>
+            </a:extLst>
+          </p:cNvPr>
+          <p:cNvSpPr/>
+          <p:nvPr/>
+        </p:nvSpPr>
+        <p:spPr>
+          <a:xfrm>
+            <a:off x="11703048" y="5672592"/>
+            <a:ext cx="216000" cy="216000"/>
+          </a:xfrm>
+          <a:prstGeom prst="ellipse">
+            <a:avLst/>
+          </a:prstGeom>
+          <a:noFill/>
+          <a:ln>
+            <a:solidFill>
+              <a:srgbClr val="FF0000"/>
+            </a:solidFill>
+          </a:ln>
+        </p:spPr>
+        <p:style>
+          <a:lnRef idx="2">
+            <a:schemeClr val="accent1">
+              <a:shade val="15000"/>
+            </a:schemeClr>
+          </a:lnRef>
+          <a:fillRef idx="1">
+            <a:schemeClr val="accent1"/>
+          </a:fillRef>
+          <a:effectRef idx="0">
+            <a:schemeClr val="accent1"/>
+          </a:effectRef>
+          <a:fontRef idx="minor">
+            <a:schemeClr val="lt1"/>
+          </a:fontRef>
+        </p:style>
+        <p:txBody>
+          <a:bodyPr rtlCol="0" anchor="ctr"/>
+          <a:lstStyle/>
+          <a:p>
+            <a:pPr algn="ctr"/>
+            <a:endParaRPr lang="en-DK"/>
+          </a:p>
+        </p:txBody>
+      </p:sp>
+      <p:sp>
+        <p:nvSpPr>
+          <p:cNvPr id="8" name="Rectangle: Rounded Corners 7">
+            <a:extLst>
+              <a:ext uri="{FF2B5EF4-FFF2-40B4-BE49-F238E27FC236}">
+                <a16:creationId xmlns:a16="http://schemas.microsoft.com/office/drawing/2014/main" id="{22FA8D30-3613-2211-7874-08022F2F2EE9}"/>
+              </a:ext>
+            </a:extLst>
+          </p:cNvPr>
+          <p:cNvSpPr/>
+          <p:nvPr/>
+        </p:nvSpPr>
+        <p:spPr>
+          <a:xfrm>
+            <a:off x="11582890" y="6008042"/>
+            <a:ext cx="336157" cy="216000"/>
+          </a:xfrm>
+          <a:prstGeom prst="roundRect">
+            <a:avLst/>
+          </a:prstGeom>
+          <a:noFill/>
+          <a:ln>
+            <a:solidFill>
+              <a:srgbClr val="FF0000"/>
+            </a:solidFill>
+          </a:ln>
+        </p:spPr>
+        <p:style>
+          <a:lnRef idx="2">
+            <a:schemeClr val="accent1">
+              <a:shade val="15000"/>
+            </a:schemeClr>
+          </a:lnRef>
+          <a:fillRef idx="1">
+            <a:schemeClr val="accent1"/>
+          </a:fillRef>
+          <a:effectRef idx="0">
+            <a:schemeClr val="accent1"/>
+          </a:effectRef>
+          <a:fontRef idx="minor">
+            <a:schemeClr val="lt1"/>
+          </a:fontRef>
+        </p:style>
+        <p:txBody>
+          <a:bodyPr rtlCol="0" anchor="ctr"/>
+          <a:lstStyle/>
+          <a:p>
+            <a:pPr algn="ctr"/>
+            <a:endParaRPr lang="en-DK"/>
+          </a:p>
+        </p:txBody>
+      </p:sp>
+      <p:cxnSp>
+        <p:nvCxnSpPr>
+          <p:cNvPr id="12" name="Connector: Elbow 11">
+            <a:extLst>
+              <a:ext uri="{FF2B5EF4-FFF2-40B4-BE49-F238E27FC236}">
+                <a16:creationId xmlns:a16="http://schemas.microsoft.com/office/drawing/2014/main" id="{3D5F914A-1ADF-346E-B1D8-AB1DEEDE5FB5}"/>
+              </a:ext>
+            </a:extLst>
+          </p:cNvPr>
+          <p:cNvCxnSpPr>
+            <a:cxnSpLocks/>
+            <a:stCxn id="4" idx="2"/>
+            <a:endCxn id="7" idx="6"/>
+          </p:cNvCxnSpPr>
+          <p:nvPr/>
+        </p:nvCxnSpPr>
+        <p:spPr>
+          <a:xfrm rot="5400000">
+            <a:off x="12381780" y="5189308"/>
+            <a:ext cx="128553" cy="1054015"/>
+          </a:xfrm>
+          <a:prstGeom prst="bentConnector2">
+            <a:avLst/>
+          </a:prstGeom>
+          <a:ln w="28575">
+            <a:solidFill>
+              <a:srgbClr val="FF0000"/>
+            </a:solidFill>
+            <a:tailEnd type="triangle"/>
+          </a:ln>
+        </p:spPr>
+        <p:style>
+          <a:lnRef idx="2">
+            <a:schemeClr val="accent1"/>
+          </a:lnRef>
+          <a:fillRef idx="0">
+            <a:schemeClr val="accent1"/>
+          </a:fillRef>
+          <a:effectRef idx="1">
+            <a:schemeClr val="accent1"/>
+          </a:effectRef>
+          <a:fontRef idx="minor">
+            <a:schemeClr val="tx1"/>
+          </a:fontRef>
+        </p:style>
+      </p:cxnSp>
     </p:spTree>
     <p:extLst>
       <p:ext uri="{BB962C8B-B14F-4D97-AF65-F5344CB8AC3E}">
         <p14:creationId xmlns:p14="http://schemas.microsoft.com/office/powerpoint/2010/main" val="2435479675"/>
+      </p:ext>
+    </p:extLst>
+  </p:cSld>
+  <p:clrMapOvr>
+    <a:masterClrMapping/>
+  </p:clrMapOvr>
+</p:sld>
+</file>
+
+<file path=ppt/slides/slide3.xml><?xml version="1.0" encoding="utf-8"?>
+<p:sld xmlns:a="http://schemas.openxmlformats.org/drawingml/2006/main" xmlns:r="http://schemas.openxmlformats.org/officeDocument/2006/relationships" xmlns:p="http://schemas.openxmlformats.org/presentationml/2006/main">
+  <p:cSld>
+    <p:spTree>
+      <p:nvGrpSpPr>
+        <p:cNvPr id="1" name=""/>
+        <p:cNvGrpSpPr/>
+        <p:nvPr/>
+      </p:nvGrpSpPr>
+      <p:grpSpPr>
+        <a:xfrm>
+          <a:off x="0" y="0"/>
+          <a:ext cx="0" cy="0"/>
+          <a:chOff x="0" y="0"/>
+          <a:chExt cx="0" cy="0"/>
+        </a:xfrm>
+      </p:grpSpPr>
+      <p:pic>
+        <p:nvPicPr>
+          <p:cNvPr id="2" name="Picture 1">
+            <a:extLst>
+              <a:ext uri="{FF2B5EF4-FFF2-40B4-BE49-F238E27FC236}">
+                <a16:creationId xmlns:a16="http://schemas.microsoft.com/office/drawing/2014/main" id="{39A564CC-9787-81D0-1858-1CD0071D293A}"/>
+              </a:ext>
+            </a:extLst>
+          </p:cNvPr>
+          <p:cNvPicPr>
+            <a:picLocks noChangeAspect="1"/>
+          </p:cNvPicPr>
+          <p:nvPr/>
+        </p:nvPicPr>
+        <p:blipFill>
+          <a:blip r:embed="rId2"/>
+          <a:stretch>
+            <a:fillRect/>
+          </a:stretch>
+        </p:blipFill>
+        <p:spPr>
+          <a:xfrm>
+            <a:off x="8347868" y="5785643"/>
+            <a:ext cx="4905375" cy="2828925"/>
+          </a:xfrm>
+          <a:prstGeom prst="rect">
+            <a:avLst/>
+          </a:prstGeom>
+        </p:spPr>
+      </p:pic>
+    </p:spTree>
+    <p:extLst>
+      <p:ext uri="{BB962C8B-B14F-4D97-AF65-F5344CB8AC3E}">
+        <p14:creationId xmlns:p14="http://schemas.microsoft.com/office/powerpoint/2010/main" val="2377202317"/>
       </p:ext>
     </p:extLst>
   </p:cSld>
@@ -4382,6 +5201,26 @@
 </file>
 
 <file path=customXml/item1.xml><?xml version="1.0" encoding="utf-8"?>
+<?mso-contentType ?>
+<FormTemplates xmlns="http://schemas.microsoft.com/sharepoint/v3/contenttype/forms">
+  <Display>DocumentLibraryForm</Display>
+  <Edit>DocumentLibraryForm</Edit>
+  <New>DocumentLibraryForm</New>
+</FormTemplates>
+</file>
+
+<file path=customXml/item2.xml><?xml version="1.0" encoding="utf-8"?>
+<p:properties xmlns:p="http://schemas.microsoft.com/office/2006/metadata/properties" xmlns:xsi="http://www.w3.org/2001/XMLSchema-instance" xmlns:pc="http://schemas.microsoft.com/office/infopath/2007/PartnerControls">
+  <documentManagement>
+    <TaxCatchAll xmlns="6dfb7b4b-871d-4c24-9d42-16b14ecd044c" xsi:nil="true"/>
+    <lcf76f155ced4ddcb4097134ff3c332f xmlns="51c7d8ad-74c8-4833-8478-0d0a5cafce0c">
+      <Terms xmlns="http://schemas.microsoft.com/office/infopath/2007/PartnerControls"/>
+    </lcf76f155ced4ddcb4097134ff3c332f>
+  </documentManagement>
+</p:properties>
+</file>
+
+<file path=customXml/item3.xml><?xml version="1.0" encoding="utf-8"?>
 <ct:contentTypeSchema xmlns:ct="http://schemas.microsoft.com/office/2006/metadata/contentType" xmlns:ma="http://schemas.microsoft.com/office/2006/metadata/properties/metaAttributes" ct:_="" ma:_="" ma:contentTypeName="Document" ma:contentTypeID="0x0101005B996248A2D0E04D87B9DBB54D269DA4" ma:contentTypeVersion="18" ma:contentTypeDescription="Create a new document." ma:contentTypeScope="" ma:versionID="f22bde94a6705f7f7e236c14bc19f189">
   <xsd:schema xmlns:xsd="http://www.w3.org/2001/XMLSchema" xmlns:xs="http://www.w3.org/2001/XMLSchema" xmlns:p="http://schemas.microsoft.com/office/2006/metadata/properties" xmlns:ns2="51c7d8ad-74c8-4833-8478-0d0a5cafce0c" xmlns:ns3="6dfb7b4b-871d-4c24-9d42-16b14ecd044c" targetNamespace="http://schemas.microsoft.com/office/2006/metadata/properties" ma:root="true" ma:fieldsID="273248db29f554cba2c15e8dd349c138" ns2:_="" ns3:_="">
     <xsd:import namespace="51c7d8ad-74c8-4833-8478-0d0a5cafce0c"/>
@@ -4636,27 +5475,26 @@
 </ct:contentTypeSchema>
 </file>
 
-<file path=customXml/item2.xml><?xml version="1.0" encoding="utf-8"?>
-<p:properties xmlns:p="http://schemas.microsoft.com/office/2006/metadata/properties" xmlns:xsi="http://www.w3.org/2001/XMLSchema-instance" xmlns:pc="http://schemas.microsoft.com/office/infopath/2007/PartnerControls">
-  <documentManagement>
-    <TaxCatchAll xmlns="6dfb7b4b-871d-4c24-9d42-16b14ecd044c" xsi:nil="true"/>
-    <lcf76f155ced4ddcb4097134ff3c332f xmlns="51c7d8ad-74c8-4833-8478-0d0a5cafce0c">
-      <Terms xmlns="http://schemas.microsoft.com/office/infopath/2007/PartnerControls"/>
-    </lcf76f155ced4ddcb4097134ff3c332f>
-  </documentManagement>
-</p:properties>
+<file path=customXml/itemProps1.xml><?xml version="1.0" encoding="utf-8"?>
+<ds:datastoreItem xmlns:ds="http://schemas.openxmlformats.org/officeDocument/2006/customXml" ds:itemID="{EF875D47-8106-485E-98E0-D60C6A98DA6A}">
+  <ds:schemaRefs>
+    <ds:schemaRef ds:uri="http://schemas.microsoft.com/sharepoint/v3/contenttype/forms"/>
+  </ds:schemaRefs>
+</ds:datastoreItem>
 </file>
 
-<file path=customXml/item3.xml><?xml version="1.0" encoding="utf-8"?>
-<?mso-contentType ?>
-<FormTemplates xmlns="http://schemas.microsoft.com/sharepoint/v3/contenttype/forms">
-  <Display>DocumentLibraryForm</Display>
-  <Edit>DocumentLibraryForm</Edit>
-  <New>DocumentLibraryForm</New>
-</FormTemplates>
+<file path=customXml/itemProps2.xml><?xml version="1.0" encoding="utf-8"?>
+<ds:datastoreItem xmlns:ds="http://schemas.openxmlformats.org/officeDocument/2006/customXml" ds:itemID="{2EF670CE-B0AA-4D52-AFC6-AA4BF7D46EEA}">
+  <ds:schemaRefs>
+    <ds:schemaRef ds:uri="http://schemas.microsoft.com/office/2006/metadata/properties"/>
+    <ds:schemaRef ds:uri="http://schemas.microsoft.com/office/infopath/2007/PartnerControls"/>
+    <ds:schemaRef ds:uri="6dfb7b4b-871d-4c24-9d42-16b14ecd044c"/>
+    <ds:schemaRef ds:uri="51c7d8ad-74c8-4833-8478-0d0a5cafce0c"/>
+  </ds:schemaRefs>
+</ds:datastoreItem>
 </file>
 
-<file path=customXml/itemProps1.xml><?xml version="1.0" encoding="utf-8"?>
+<file path=customXml/itemProps3.xml><?xml version="1.0" encoding="utf-8"?>
 <ds:datastoreItem xmlns:ds="http://schemas.openxmlformats.org/officeDocument/2006/customXml" ds:itemID="{172A1115-3E72-42E2-A544-7EAA53D3702E}">
   <ds:schemaRefs>
     <ds:schemaRef ds:uri="http://schemas.microsoft.com/office/2006/metadata/contentType"/>
@@ -4673,23 +5511,4 @@
     <ds:schemaRef ds:uri="http://schemas.microsoft.com/internal/obd"/>
   </ds:schemaRefs>
 </ds:datastoreItem>
-</file>
-
-<file path=customXml/itemProps2.xml><?xml version="1.0" encoding="utf-8"?>
-<ds:datastoreItem xmlns:ds="http://schemas.openxmlformats.org/officeDocument/2006/customXml" ds:itemID="{2EF670CE-B0AA-4D52-AFC6-AA4BF7D46EEA}">
-  <ds:schemaRefs>
-    <ds:schemaRef ds:uri="http://schemas.microsoft.com/office/2006/metadata/properties"/>
-    <ds:schemaRef ds:uri="http://schemas.microsoft.com/office/infopath/2007/PartnerControls"/>
-    <ds:schemaRef ds:uri="6dfb7b4b-871d-4c24-9d42-16b14ecd044c"/>
-    <ds:schemaRef ds:uri="51c7d8ad-74c8-4833-8478-0d0a5cafce0c"/>
-  </ds:schemaRefs>
-</ds:datastoreItem>
-</file>
-
-<file path=customXml/itemProps3.xml><?xml version="1.0" encoding="utf-8"?>
-<ds:datastoreItem xmlns:ds="http://schemas.openxmlformats.org/officeDocument/2006/customXml" ds:itemID="{EF875D47-8106-485E-98E0-D60C6A98DA6A}">
-  <ds:schemaRefs>
-    <ds:schemaRef ds:uri="http://schemas.microsoft.com/sharepoint/v3/contenttype/forms"/>
-  </ds:schemaRefs>
-</ds:datastoreItem>
 </file>